--- a/docs/ahg-2026/kit/accessibility-agents.pptx
+++ b/docs/ahg-2026/kit/accessibility-agents.pptx
@@ -22,6 +22,11 @@
     <p:sldId id="270" r:id="rId21"/>
     <p:sldId id="271" r:id="rId22"/>
     <p:sldId id="272" r:id="rId23"/>
+    <p:sldId id="273" r:id="rId24"/>
+    <p:sldId id="274" r:id="rId25"/>
+    <p:sldId id="275" r:id="rId26"/>
+    <p:sldId id="276" r:id="rId27"/>
+    <p:sldId id="277" r:id="rId28"/>
   </p:sldIdLst>
   <p:sldSz cx="12191695" cy="6858000" type="screen4x3"/>
   <p:notesSz cx="6858000" cy="9144000"/>
@@ -3382,7 +3387,7 @@
                         <a:rPr sz="1800" b="0" lang="en-US">
                           <a:latin typeface="Arial"/>
                         </a:rPr>
-                        <a:t> setting, then run Chat: Install Plugin From Source with </a:t>
+                        <a:t> setting, then run Chat: Install Plugin from Source with </a:t>
                       </a:r>
                       <a:r>
                         <a:rPr sz="1800" b="0" lang="en-US">
@@ -4029,7 +4034,7 @@
               <a:rPr sz="3600" b="1" lang="en-US">
                 <a:latin typeface="Arial"/>
               </a:rPr>
-              <a:t>Using it with your own agent</a:t>
+              <a:t>Getting it: Where Accessibility Agents is available, as of 29 October 2026 (1 of 4)</a:t>
             </a:r>
           </a:p>
         </p:txBody>
@@ -4054,78 +4059,17 @@
           <a:bodyPr wrap="square"/>
           <a:lstStyle/>
           <a:p>
-            <a:pPr lvl="1">
+            <a:pPr marL="0" indent="0">
               <a:spcAft>
                 <a:spcPts val="600"/>
               </a:spcAft>
+              <a:buNone/>
             </a:pPr>
             <a:r>
               <a:rPr sz="2000" b="0" lang="en-US">
                 <a:latin typeface="Arial"/>
               </a:rPr>
-              <a:t>Keep your agent beside the others: put it in </a:t>
-            </a:r>
-            <a:r>
-              <a:rPr sz="2000" b="0" lang="en-US">
-                <a:latin typeface="Consolas"/>
-              </a:rPr>
-              <a:t>.github/skills/&lt;name&gt;/</a:t>
-            </a:r>
-            <a:r>
-              <a:rPr sz="2000" b="0" lang="en-US">
-                <a:latin typeface="Arial"/>
-              </a:rPr>
-              <a:t>, next to the Accessibility Agents folders. It is the same format, so it works the same way.</a:t>
-            </a:r>
-          </a:p>
-          <a:p>
-            <a:pPr lvl="1">
-              <a:spcAft>
-                <a:spcPts val="600"/>
-              </a:spcAft>
-            </a:pPr>
-            <a:r>
-              <a:rPr sz="2000" b="0" lang="en-US">
-                <a:latin typeface="Arial"/>
-              </a:rPr>
-              <a:t>Revise it the way you did today: try it, read where it guessed, change one thing. The principles are in </a:t>
-            </a:r>
-            <a:r>
-              <a:rPr sz="2000" b="0" lang="en-US">
-                <a:latin typeface="Consolas"/>
-              </a:rPr>
-              <a:t>agent-file-principles.md</a:t>
-            </a:r>
-            <a:r>
-              <a:rPr sz="2000" b="0" lang="en-US">
-                <a:latin typeface="Arial"/>
-              </a:rPr>
-              <a:t> in this kit.</a:t>
-            </a:r>
-          </a:p>
-          <a:p>
-            <a:pPr lvl="1">
-              <a:spcAft>
-                <a:spcPts val="600"/>
-              </a:spcAft>
-            </a:pPr>
-            <a:r>
-              <a:rPr sz="2000" b="0" lang="en-US">
-                <a:latin typeface="Arial"/>
-              </a:rPr>
-              <a:t>Your shared agent is in the AHG 2026 collection, and goes into Accessibility Agents in </a:t>
-            </a:r>
-            <a:r>
-              <a:rPr sz="2000" b="0" lang="en-US">
-                <a:latin typeface="Consolas"/>
-              </a:rPr>
-              <a:t>community/ahg-2026/</a:t>
-            </a:r>
-            <a:r>
-              <a:rPr sz="2000" b="0" lang="en-US">
-                <a:latin typeface="Arial"/>
-              </a:rPr>
-              <a:t> with your name on it.</a:t>
+              <a:t>Each row is one place you might use it, whether it works there today, and how.</a:t>
             </a:r>
           </a:p>
         </p:txBody>
@@ -4172,7 +4116,549 @@
               <a:rPr sz="3600" b="1" lang="en-US">
                 <a:latin typeface="Arial"/>
               </a:rPr>
-              <a:t>Getting help, and helping</a:t>
+              <a:t>Getting it: Where Accessibility Agents is available, as of 29 October 2026 (2 of 4)</a:t>
+            </a:r>
+          </a:p>
+        </p:txBody>
+      </p:sp>
+      <p:graphicFrame>
+        <p:nvGraphicFramePr>
+          <p:cNvPr id="3" name="Table 2" descr="Table: Getting it: Where Accessibility Agents is available, as of 29 October 2026. Columns: Where, Available now, How."/>
+          <p:cNvGraphicFramePr>
+            <a:graphicFrameLocks noGrp="1"/>
+          </p:cNvGraphicFramePr>
+          <p:nvPr/>
+        </p:nvGraphicFramePr>
+        <p:xfrm>
+          <a:off x="548640" y="1554480"/>
+          <a:ext cx="11064240" cy="2286000"/>
+        </p:xfrm>
+        <a:graphic>
+          <a:graphicData uri="http://schemas.openxmlformats.org/drawingml/2006/table">
+            <a:tbl>
+              <a:tblPr firstRow="1" bandRow="1">
+                <a:tableStyleId>{5C22544A-7EE6-4342-B048-85BDC9FD1C3A}</a:tableStyleId>
+              </a:tblPr>
+              <a:tblGrid>
+                <a:gridCol w="3688080"/>
+                <a:gridCol w="3688080"/>
+                <a:gridCol w="3688080"/>
+              </a:tblGrid>
+              <a:tr h="457200">
+                <a:tc>
+                  <a:txBody>
+                    <a:bodyPr/>
+                    <a:lstStyle/>
+                    <a:p>
+                      <a:r>
+                        <a:rPr sz="1800" b="1" lang="en-US">
+                          <a:latin typeface="Arial"/>
+                        </a:rPr>
+                        <a:t>Where</a:t>
+                      </a:r>
+                    </a:p>
+                  </a:txBody>
+                  <a:tcPr/>
+                </a:tc>
+                <a:tc>
+                  <a:txBody>
+                    <a:bodyPr/>
+                    <a:lstStyle/>
+                    <a:p>
+                      <a:r>
+                        <a:rPr sz="1800" b="1" lang="en-US">
+                          <a:latin typeface="Arial"/>
+                        </a:rPr>
+                        <a:t>Available now</a:t>
+                      </a:r>
+                    </a:p>
+                  </a:txBody>
+                  <a:tcPr/>
+                </a:tc>
+                <a:tc>
+                  <a:txBody>
+                    <a:bodyPr/>
+                    <a:lstStyle/>
+                    <a:p>
+                      <a:r>
+                        <a:rPr sz="1800" b="1" lang="en-US">
+                          <a:latin typeface="Arial"/>
+                        </a:rPr>
+                        <a:t>How</a:t>
+                      </a:r>
+                    </a:p>
+                  </a:txBody>
+                  <a:tcPr/>
+                </a:tc>
+              </a:tr>
+              <a:tr h="457200">
+                <a:tc>
+                  <a:txBody>
+                    <a:bodyPr wrap="square"/>
+                    <a:lstStyle/>
+                    <a:p>
+                      <a:r>
+                        <a:rPr sz="1800" b="0" lang="en-US">
+                          <a:latin typeface="Arial"/>
+                        </a:rPr>
+                        <a:t>VS Code, on a computer or at vscode.dev</a:t>
+                      </a:r>
+                    </a:p>
+                  </a:txBody>
+                  <a:tcPr/>
+                </a:tc>
+                <a:tc>
+                  <a:txBody>
+                    <a:bodyPr wrap="square"/>
+                    <a:lstStyle/>
+                    <a:p>
+                      <a:r>
+                        <a:rPr sz="1800" b="0" lang="en-US">
+                          <a:latin typeface="Arial"/>
+                        </a:rPr>
+                        <a:t>Yes, all 113 skills</a:t>
+                      </a:r>
+                    </a:p>
+                  </a:txBody>
+                  <a:tcPr/>
+                </a:tc>
+                <a:tc>
+                  <a:txBody>
+                    <a:bodyPr wrap="square"/>
+                    <a:lstStyle/>
+                    <a:p>
+                      <a:r>
+                        <a:rPr sz="1800" b="0" lang="en-US">
+                          <a:latin typeface="Arial"/>
+                        </a:rPr>
+                        <a:t>Already in this kit, or copy the </a:t>
+                      </a:r>
+                      <a:r>
+                        <a:rPr sz="1800" b="0" lang="en-US">
+                          <a:latin typeface="Consolas"/>
+                        </a:rPr>
+                        <a:t>skills</a:t>
+                      </a:r>
+                      <a:r>
+                        <a:rPr sz="1800" b="0" lang="en-US">
+                          <a:latin typeface="Arial"/>
+                        </a:rPr>
+                        <a:t> folders into </a:t>
+                      </a:r>
+                      <a:r>
+                        <a:rPr sz="1800" b="0" lang="en-US">
+                          <a:latin typeface="Consolas"/>
+                        </a:rPr>
+                        <a:t>.github/skills</a:t>
+                      </a:r>
+                    </a:p>
+                  </a:txBody>
+                  <a:tcPr/>
+                </a:tc>
+              </a:tr>
+              <a:tr h="457200">
+                <a:tc>
+                  <a:txBody>
+                    <a:bodyPr wrap="square"/>
+                    <a:lstStyle/>
+                    <a:p>
+                      <a:r>
+                        <a:rPr sz="1800" b="0" lang="en-US">
+                          <a:latin typeface="Arial"/>
+                        </a:rPr>
+                        <a:t>GitHub Codespaces</a:t>
+                      </a:r>
+                    </a:p>
+                  </a:txBody>
+                  <a:tcPr/>
+                </a:tc>
+                <a:tc>
+                  <a:txBody>
+                    <a:bodyPr wrap="square"/>
+                    <a:lstStyle/>
+                    <a:p>
+                      <a:r>
+                        <a:rPr sz="1800" b="0" lang="en-US">
+                          <a:latin typeface="Arial"/>
+                        </a:rPr>
+                        <a:t>Yes, with the scanners</a:t>
+                      </a:r>
+                    </a:p>
+                  </a:txBody>
+                  <a:tcPr/>
+                </a:tc>
+                <a:tc>
+                  <a:txBody>
+                    <a:bodyPr wrap="square"/>
+                    <a:lstStyle/>
+                    <a:p>
+                      <a:r>
+                        <a:rPr sz="1800" b="0" lang="en-US">
+                          <a:latin typeface="Arial"/>
+                        </a:rPr>
+                        <a:t>codespaces.new/Community-Access/accessibility-agents</a:t>
+                      </a:r>
+                    </a:p>
+                  </a:txBody>
+                  <a:tcPr/>
+                </a:tc>
+              </a:tr>
+              <a:tr h="457200">
+                <a:tc>
+                  <a:txBody>
+                    <a:bodyPr wrap="square"/>
+                    <a:lstStyle/>
+                    <a:p>
+                      <a:r>
+                        <a:rPr sz="1800" b="0" lang="en-US">
+                          <a:latin typeface="Arial"/>
+                        </a:rPr>
+                        <a:t>GitHub Copilot CLI, Claude Code, Codex, Gemini CLI</a:t>
+                      </a:r>
+                    </a:p>
+                  </a:txBody>
+                  <a:tcPr/>
+                </a:tc>
+                <a:tc>
+                  <a:txBody>
+                    <a:bodyPr wrap="square"/>
+                    <a:lstStyle/>
+                    <a:p>
+                      <a:r>
+                        <a:rPr sz="1800" b="0" lang="en-US">
+                          <a:latin typeface="Arial"/>
+                        </a:rPr>
+                        <a:t>Yes, with the scanners and review hooks</a:t>
+                      </a:r>
+                    </a:p>
+                  </a:txBody>
+                  <a:tcPr/>
+                </a:tc>
+                <a:tc>
+                  <a:txBody>
+                    <a:bodyPr wrap="square"/>
+                    <a:lstStyle/>
+                    <a:p>
+                      <a:r>
+                        <a:rPr sz="1800" b="0" lang="en-US">
+                          <a:latin typeface="Arial"/>
+                        </a:rPr>
+                        <a:t>The install lines above</a:t>
+                      </a:r>
+                    </a:p>
+                  </a:txBody>
+                  <a:tcPr/>
+                </a:tc>
+              </a:tr>
+              <a:tr h="457200">
+                <a:tc>
+                  <a:txBody>
+                    <a:bodyPr wrap="square"/>
+                    <a:lstStyle/>
+                    <a:p>
+                      <a:r>
+                        <a:rPr sz="1800" b="0" lang="en-US">
+                          <a:latin typeface="Arial"/>
+                        </a:rPr>
+                        <a:t>ChatGPT, on a free or paid account</a:t>
+                      </a:r>
+                    </a:p>
+                  </a:txBody>
+                  <a:tcPr/>
+                </a:tc>
+                <a:tc>
+                  <a:txBody>
+                    <a:bodyPr wrap="square"/>
+                    <a:lstStyle/>
+                    <a:p>
+                      <a:r>
+                        <a:rPr sz="1800" b="0" lang="en-US">
+                          <a:latin typeface="Arial"/>
+                        </a:rPr>
+                        <a:t>Yes, by pasting</a:t>
+                      </a:r>
+                    </a:p>
+                  </a:txBody>
+                  <a:tcPr/>
+                </a:tc>
+                <a:tc>
+                  <a:txBody>
+                    <a:bodyPr wrap="square"/>
+                    <a:lstStyle/>
+                    <a:p>
+                      <a:r>
+                        <a:rPr sz="1800" b="0" lang="en-US">
+                          <a:latin typeface="Arial"/>
+                        </a:rPr>
+                        <a:t>The texts on letitglow.app/ahg/assistant, as above</a:t>
+                      </a:r>
+                    </a:p>
+                  </a:txBody>
+                  <a:tcPr/>
+                </a:tc>
+              </a:tr>
+            </a:tbl>
+          </a:graphicData>
+        </a:graphic>
+      </p:graphicFrame>
+    </p:spTree>
+  </p:cSld>
+  <p:clrMapOvr>
+    <a:masterClrMapping/>
+  </p:clrMapOvr>
+</p:sld>
+</file>
+
+<file path=ppt/slides/slide18.xml><?xml version="1.0" encoding="utf-8"?>
+<p:sld xmlns:a="http://schemas.openxmlformats.org/drawingml/2006/main" xmlns:p="http://schemas.openxmlformats.org/presentationml/2006/main" xmlns:r="http://schemas.openxmlformats.org/officeDocument/2006/relationships">
+  <p:cSld>
+    <p:spTree>
+      <p:nvGrpSpPr>
+        <p:cNvPr id="1" name=""/>
+        <p:cNvGrpSpPr/>
+        <p:nvPr/>
+      </p:nvGrpSpPr>
+      <p:grpSpPr/>
+      <p:sp>
+        <p:nvSpPr>
+          <p:cNvPr id="2" name="Title 1"/>
+          <p:cNvSpPr>
+            <a:spLocks noGrp="1"/>
+          </p:cNvSpPr>
+          <p:nvPr>
+            <p:ph type="title"/>
+          </p:nvPr>
+        </p:nvSpPr>
+        <p:spPr>
+          <a:xfrm>
+            <a:off x="548640" y="365760"/>
+            <a:ext cx="11064240" cy="1097280"/>
+          </a:xfrm>
+        </p:spPr>
+        <p:txBody>
+          <a:bodyPr wrap="square"/>
+          <a:lstStyle/>
+          <a:p>
+            <a:r>
+              <a:rPr sz="3600" b="1" lang="en-US">
+                <a:latin typeface="Arial"/>
+              </a:rPr>
+              <a:t>Getting it: Where Accessibility Agents is available, as of 29 October 2026 (3 of 4)</a:t>
+            </a:r>
+          </a:p>
+        </p:txBody>
+      </p:sp>
+      <p:graphicFrame>
+        <p:nvGraphicFramePr>
+          <p:cNvPr id="3" name="Table 2" descr="Table: Getting it: Where Accessibility Agents is available, as of 29 October 2026. Columns: Where, Available now, How."/>
+          <p:cNvGraphicFramePr>
+            <a:graphicFrameLocks noGrp="1"/>
+          </p:cNvGraphicFramePr>
+          <p:nvPr/>
+        </p:nvGraphicFramePr>
+        <p:xfrm>
+          <a:off x="548640" y="1554480"/>
+          <a:ext cx="11064240" cy="1371600"/>
+        </p:xfrm>
+        <a:graphic>
+          <a:graphicData uri="http://schemas.openxmlformats.org/drawingml/2006/table">
+            <a:tbl>
+              <a:tblPr firstRow="1" bandRow="1">
+                <a:tableStyleId>{5C22544A-7EE6-4342-B048-85BDC9FD1C3A}</a:tableStyleId>
+              </a:tblPr>
+              <a:tblGrid>
+                <a:gridCol w="3688080"/>
+                <a:gridCol w="3688080"/>
+                <a:gridCol w="3688080"/>
+              </a:tblGrid>
+              <a:tr h="457200">
+                <a:tc>
+                  <a:txBody>
+                    <a:bodyPr/>
+                    <a:lstStyle/>
+                    <a:p>
+                      <a:r>
+                        <a:rPr sz="1800" b="1" lang="en-US">
+                          <a:latin typeface="Arial"/>
+                        </a:rPr>
+                        <a:t>Where</a:t>
+                      </a:r>
+                    </a:p>
+                  </a:txBody>
+                  <a:tcPr/>
+                </a:tc>
+                <a:tc>
+                  <a:txBody>
+                    <a:bodyPr/>
+                    <a:lstStyle/>
+                    <a:p>
+                      <a:r>
+                        <a:rPr sz="1800" b="1" lang="en-US">
+                          <a:latin typeface="Arial"/>
+                        </a:rPr>
+                        <a:t>Available now</a:t>
+                      </a:r>
+                    </a:p>
+                  </a:txBody>
+                  <a:tcPr/>
+                </a:tc>
+                <a:tc>
+                  <a:txBody>
+                    <a:bodyPr/>
+                    <a:lstStyle/>
+                    <a:p>
+                      <a:r>
+                        <a:rPr sz="1800" b="1" lang="en-US">
+                          <a:latin typeface="Arial"/>
+                        </a:rPr>
+                        <a:t>How</a:t>
+                      </a:r>
+                    </a:p>
+                  </a:txBody>
+                  <a:tcPr/>
+                </a:tc>
+              </a:tr>
+              <a:tr h="457200">
+                <a:tc>
+                  <a:txBody>
+                    <a:bodyPr wrap="square"/>
+                    <a:lstStyle/>
+                    <a:p>
+                      <a:r>
+                        <a:rPr sz="1800" b="0" lang="en-US">
+                          <a:latin typeface="Arial"/>
+                        </a:rPr>
+                        <a:t>ChatGPT's plugin directory</a:t>
+                      </a:r>
+                    </a:p>
+                  </a:txBody>
+                  <a:tcPr/>
+                </a:tc>
+                <a:tc>
+                  <a:txBody>
+                    <a:bodyPr wrap="square"/>
+                    <a:lstStyle/>
+                    <a:p>
+                      <a:r>
+                        <a:rPr sz="1800" b="0" lang="en-US">
+                          <a:latin typeface="Arial"/>
+                        </a:rPr>
+                        <a:t>Not yet</a:t>
+                      </a:r>
+                    </a:p>
+                  </a:txBody>
+                  <a:tcPr/>
+                </a:tc>
+                <a:tc>
+                  <a:txBody>
+                    <a:bodyPr wrap="square"/>
+                    <a:lstStyle/>
+                    <a:p>
+                      <a:r>
+                        <a:rPr sz="1800" b="0" lang="en-US">
+                          <a:latin typeface="Arial"/>
+                        </a:rPr>
+                        <a:t>Being prepared. When it is listed, you will install it once from Plugins in ChatGPT's sidebar instead of pasting a text</a:t>
+                      </a:r>
+                    </a:p>
+                  </a:txBody>
+                  <a:tcPr/>
+                </a:tc>
+              </a:tr>
+              <a:tr h="457200">
+                <a:tc>
+                  <a:txBody>
+                    <a:bodyPr wrap="square"/>
+                    <a:lstStyle/>
+                    <a:p>
+                      <a:r>
+                        <a:rPr sz="1800" b="0" lang="en-US">
+                          <a:latin typeface="Arial"/>
+                        </a:rPr>
+                        <a:t>Claude, Gemini, Copilot on github.com, a campus assistant</a:t>
+                      </a:r>
+                    </a:p>
+                  </a:txBody>
+                  <a:tcPr/>
+                </a:tc>
+                <a:tc>
+                  <a:txBody>
+                    <a:bodyPr wrap="square"/>
+                    <a:lstStyle/>
+                    <a:p>
+                      <a:r>
+                        <a:rPr sz="1800" b="0" lang="en-US">
+                          <a:latin typeface="Arial"/>
+                        </a:rPr>
+                        <a:t>Yes, by pasting</a:t>
+                      </a:r>
+                    </a:p>
+                  </a:txBody>
+                  <a:tcPr/>
+                </a:tc>
+                <a:tc>
+                  <a:txBody>
+                    <a:bodyPr wrap="square"/>
+                    <a:lstStyle/>
+                    <a:p>
+                      <a:r>
+                        <a:rPr sz="1800" b="0" lang="en-US">
+                          <a:latin typeface="Arial"/>
+                        </a:rPr>
+                        <a:t>The same texts</a:t>
+                      </a:r>
+                    </a:p>
+                  </a:txBody>
+                  <a:tcPr/>
+                </a:tc>
+              </a:tr>
+            </a:tbl>
+          </a:graphicData>
+        </a:graphic>
+      </p:graphicFrame>
+    </p:spTree>
+  </p:cSld>
+  <p:clrMapOvr>
+    <a:masterClrMapping/>
+  </p:clrMapOvr>
+</p:sld>
+</file>
+
+<file path=ppt/slides/slide19.xml><?xml version="1.0" encoding="utf-8"?>
+<p:sld xmlns:a="http://schemas.openxmlformats.org/drawingml/2006/main" xmlns:p="http://schemas.openxmlformats.org/presentationml/2006/main" xmlns:r="http://schemas.openxmlformats.org/officeDocument/2006/relationships">
+  <p:cSld>
+    <p:spTree>
+      <p:nvGrpSpPr>
+        <p:cNvPr id="1" name=""/>
+        <p:cNvGrpSpPr/>
+        <p:nvPr/>
+      </p:nvGrpSpPr>
+      <p:grpSpPr/>
+      <p:sp>
+        <p:nvSpPr>
+          <p:cNvPr id="2" name="Title 1"/>
+          <p:cNvSpPr>
+            <a:spLocks noGrp="1"/>
+          </p:cNvSpPr>
+          <p:nvPr>
+            <p:ph type="title"/>
+          </p:nvPr>
+        </p:nvSpPr>
+        <p:spPr>
+          <a:xfrm>
+            <a:off x="548640" y="365760"/>
+            <a:ext cx="11064240" cy="1097280"/>
+          </a:xfrm>
+        </p:spPr>
+        <p:txBody>
+          <a:bodyPr wrap="square"/>
+          <a:lstStyle/>
+          <a:p>
+            <a:r>
+              <a:rPr sz="3600" b="1" lang="en-US">
+                <a:latin typeface="Arial"/>
+              </a:rPr>
+              <a:t>Getting it: Where Accessibility Agents is available, as of 29 October 2026 (4 of 4)</a:t>
             </a:r>
           </a:p>
         </p:txBody>
@@ -4197,55 +4683,17 @@
           <a:bodyPr wrap="square"/>
           <a:lstStyle/>
           <a:p>
-            <a:pPr lvl="1">
+            <a:pPr marL="0" indent="0">
               <a:spcAft>
                 <a:spcPts val="600"/>
               </a:spcAft>
+              <a:buNone/>
             </a:pPr>
             <a:r>
               <a:rPr sz="2000" b="0" lang="en-US">
                 <a:latin typeface="Arial"/>
               </a:rPr>
-              <a:t>Questions about the workshop: </a:t>
-            </a:r>
-            <a:r>
-              <a:rPr sz="2000" b="0" lang="en-US">
-                <a:latin typeface="Arial"/>
-                <a:hlinkClick r:id="rId2"/>
-              </a:rPr>
-              <a:t>support@community-access.org</a:t>
-            </a:r>
-            <a:r>
-              <a:rPr sz="2000" b="0" lang="en-US">
-                <a:latin typeface="Arial"/>
-              </a:rPr>
-              <a:t>.</a:t>
-            </a:r>
-          </a:p>
-          <a:p>
-            <a:pPr lvl="1">
-              <a:spcAft>
-                <a:spcPts val="600"/>
-              </a:spcAft>
-            </a:pPr>
-            <a:r>
-              <a:rPr sz="2000" b="0" lang="en-US">
-                <a:latin typeface="Arial"/>
-              </a:rPr>
-              <a:t>A rule an agent gets wrong, or a pattern it should catch: open an issue on github.com/Community-Access/accessibility-agents.</a:t>
-            </a:r>
-          </a:p>
-          <a:p>
-            <a:pPr lvl="1">
-              <a:spcAft>
-                <a:spcPts val="600"/>
-              </a:spcAft>
-            </a:pPr>
-            <a:r>
-              <a:rPr sz="2000" b="0" lang="en-US">
-                <a:latin typeface="Arial"/>
-              </a:rPr>
-              <a:t>The two rules still apply: nothing private goes into any AI, and a person reviews everything an agent writes.</a:t>
+              <a:t>ChatGPT itself: a free account works for the whole day. Sign in before you start, because ChatGPT without an account stops after a message or two. On the web and on a phone, ChatGPT reads skills only when they come in a plugin from its directory; until Accessibility Agents is listed there, the pasted texts are the way in. In every assistant, a skill that needs a scanner asks for your checker's results instead.</a:t>
             </a:r>
           </a:p>
         </p:txBody>
@@ -4342,6 +4790,511 @@
                 <a:latin typeface="Arial"/>
               </a:rPr>
               <a:t>The office team you ran this afternoon is a small version of it. The full project reviews web pages, Word, Excel, PowerPoint, PDF and ePub files, Markdown, Python and desktop apps, NVDA add-ons and GitHub work, and it cites WCAG 2.2 for every finding.</a:t>
+            </a:r>
+          </a:p>
+        </p:txBody>
+      </p:sp>
+    </p:spTree>
+  </p:cSld>
+  <p:clrMapOvr>
+    <a:masterClrMapping/>
+  </p:clrMapOvr>
+</p:sld>
+</file>
+
+<file path=ppt/slides/slide20.xml><?xml version="1.0" encoding="utf-8"?>
+<p:sld xmlns:a="http://schemas.openxmlformats.org/drawingml/2006/main" xmlns:p="http://schemas.openxmlformats.org/presentationml/2006/main" xmlns:r="http://schemas.openxmlformats.org/officeDocument/2006/relationships">
+  <p:cSld>
+    <p:spTree>
+      <p:nvGrpSpPr>
+        <p:cNvPr id="1" name=""/>
+        <p:cNvGrpSpPr/>
+        <p:nvPr/>
+      </p:nvGrpSpPr>
+      <p:grpSpPr/>
+      <p:sp>
+        <p:nvSpPr>
+          <p:cNvPr id="2" name="Title 1"/>
+          <p:cNvSpPr>
+            <a:spLocks noGrp="1"/>
+          </p:cNvSpPr>
+          <p:nvPr>
+            <p:ph type="title"/>
+          </p:nvPr>
+        </p:nvSpPr>
+        <p:spPr>
+          <a:xfrm>
+            <a:off x="548640" y="365760"/>
+            <a:ext cx="11064240" cy="1097280"/>
+          </a:xfrm>
+        </p:spPr>
+        <p:txBody>
+          <a:bodyPr wrap="square"/>
+          <a:lstStyle/>
+          <a:p>
+            <a:r>
+              <a:rPr sz="3600" b="1" lang="en-US">
+                <a:latin typeface="Arial"/>
+              </a:rPr>
+              <a:t>Using it with your own agent</a:t>
+            </a:r>
+          </a:p>
+        </p:txBody>
+      </p:sp>
+      <p:sp>
+        <p:nvSpPr>
+          <p:cNvPr id="3" name="Content Placeholder 2"/>
+          <p:cNvSpPr>
+            <a:spLocks noGrp="1"/>
+          </p:cNvSpPr>
+          <p:nvPr>
+            <p:ph idx="1"/>
+          </p:nvPr>
+        </p:nvSpPr>
+        <p:spPr>
+          <a:xfrm>
+            <a:off x="548640" y="1554480"/>
+            <a:ext cx="11064240" cy="4937760"/>
+          </a:xfrm>
+        </p:spPr>
+        <p:txBody>
+          <a:bodyPr wrap="square"/>
+          <a:lstStyle/>
+          <a:p>
+            <a:pPr lvl="1">
+              <a:spcAft>
+                <a:spcPts val="600"/>
+              </a:spcAft>
+            </a:pPr>
+            <a:r>
+              <a:rPr sz="2000" b="0" lang="en-US">
+                <a:latin typeface="Arial"/>
+              </a:rPr>
+              <a:t>Keep your agent beside the others: put it in </a:t>
+            </a:r>
+            <a:r>
+              <a:rPr sz="2000" b="0" lang="en-US">
+                <a:latin typeface="Consolas"/>
+              </a:rPr>
+              <a:t>.github/skills/&lt;name&gt;/</a:t>
+            </a:r>
+            <a:r>
+              <a:rPr sz="2000" b="0" lang="en-US">
+                <a:latin typeface="Arial"/>
+              </a:rPr>
+              <a:t>, next to the Accessibility Agents folders. It is the same format, so it works the same way.</a:t>
+            </a:r>
+          </a:p>
+          <a:p>
+            <a:pPr lvl="1">
+              <a:spcAft>
+                <a:spcPts val="600"/>
+              </a:spcAft>
+            </a:pPr>
+            <a:r>
+              <a:rPr sz="2000" b="0" lang="en-US">
+                <a:latin typeface="Arial"/>
+              </a:rPr>
+              <a:t>Revise it the way you did today: try it, read where it guessed, change one thing. The principles are in </a:t>
+            </a:r>
+            <a:r>
+              <a:rPr sz="2000" b="0" lang="en-US">
+                <a:latin typeface="Consolas"/>
+              </a:rPr>
+              <a:t>agent-file-principles.md</a:t>
+            </a:r>
+            <a:r>
+              <a:rPr sz="2000" b="0" lang="en-US">
+                <a:latin typeface="Arial"/>
+              </a:rPr>
+              <a:t> in this kit.</a:t>
+            </a:r>
+          </a:p>
+          <a:p>
+            <a:pPr lvl="1">
+              <a:spcAft>
+                <a:spcPts val="600"/>
+              </a:spcAft>
+            </a:pPr>
+            <a:r>
+              <a:rPr sz="2000" b="0" lang="en-US">
+                <a:latin typeface="Arial"/>
+              </a:rPr>
+              <a:t>Your shared agent is in the AHG 2026 collection, and goes into Accessibility Agents in </a:t>
+            </a:r>
+            <a:r>
+              <a:rPr sz="2000" b="0" lang="en-US">
+                <a:latin typeface="Consolas"/>
+              </a:rPr>
+              <a:t>community/ahg-2026/</a:t>
+            </a:r>
+            <a:r>
+              <a:rPr sz="2000" b="0" lang="en-US">
+                <a:latin typeface="Arial"/>
+              </a:rPr>
+              <a:t> with your name on it.</a:t>
+            </a:r>
+          </a:p>
+        </p:txBody>
+      </p:sp>
+    </p:spTree>
+  </p:cSld>
+  <p:clrMapOvr>
+    <a:masterClrMapping/>
+  </p:clrMapOvr>
+</p:sld>
+</file>
+
+<file path=ppt/slides/slide21.xml><?xml version="1.0" encoding="utf-8"?>
+<p:sld xmlns:a="http://schemas.openxmlformats.org/drawingml/2006/main" xmlns:p="http://schemas.openxmlformats.org/presentationml/2006/main" xmlns:r="http://schemas.openxmlformats.org/officeDocument/2006/relationships">
+  <p:cSld>
+    <p:spTree>
+      <p:nvGrpSpPr>
+        <p:cNvPr id="1" name=""/>
+        <p:cNvGrpSpPr/>
+        <p:nvPr/>
+      </p:nvGrpSpPr>
+      <p:grpSpPr/>
+      <p:sp>
+        <p:nvSpPr>
+          <p:cNvPr id="2" name="Title 1"/>
+          <p:cNvSpPr>
+            <a:spLocks noGrp="1"/>
+          </p:cNvSpPr>
+          <p:nvPr>
+            <p:ph type="title"/>
+          </p:nvPr>
+        </p:nvSpPr>
+        <p:spPr>
+          <a:xfrm>
+            <a:off x="548640" y="365760"/>
+            <a:ext cx="11064240" cy="1097280"/>
+          </a:xfrm>
+        </p:spPr>
+        <p:txBody>
+          <a:bodyPr wrap="square"/>
+          <a:lstStyle/>
+          <a:p>
+            <a:r>
+              <a:rPr sz="3600" b="1" lang="en-US">
+                <a:latin typeface="Arial"/>
+              </a:rPr>
+              <a:t>Getting help, and helping</a:t>
+            </a:r>
+          </a:p>
+        </p:txBody>
+      </p:sp>
+      <p:sp>
+        <p:nvSpPr>
+          <p:cNvPr id="3" name="Content Placeholder 2"/>
+          <p:cNvSpPr>
+            <a:spLocks noGrp="1"/>
+          </p:cNvSpPr>
+          <p:nvPr>
+            <p:ph idx="1"/>
+          </p:nvPr>
+        </p:nvSpPr>
+        <p:spPr>
+          <a:xfrm>
+            <a:off x="548640" y="1554480"/>
+            <a:ext cx="11064240" cy="4937760"/>
+          </a:xfrm>
+        </p:spPr>
+        <p:txBody>
+          <a:bodyPr wrap="square"/>
+          <a:lstStyle/>
+          <a:p>
+            <a:pPr lvl="1">
+              <a:spcAft>
+                <a:spcPts val="600"/>
+              </a:spcAft>
+            </a:pPr>
+            <a:r>
+              <a:rPr sz="2000" b="0" lang="en-US">
+                <a:latin typeface="Arial"/>
+              </a:rPr>
+              <a:t>Questions about the workshop: </a:t>
+            </a:r>
+            <a:r>
+              <a:rPr sz="2000" b="0" lang="en-US">
+                <a:latin typeface="Arial"/>
+                <a:hlinkClick r:id="rId2"/>
+              </a:rPr>
+              <a:t>support@community-access.org</a:t>
+            </a:r>
+            <a:r>
+              <a:rPr sz="2000" b="0" lang="en-US">
+                <a:latin typeface="Arial"/>
+              </a:rPr>
+              <a:t>.</a:t>
+            </a:r>
+          </a:p>
+          <a:p>
+            <a:pPr lvl="1">
+              <a:spcAft>
+                <a:spcPts val="600"/>
+              </a:spcAft>
+            </a:pPr>
+            <a:r>
+              <a:rPr sz="2000" b="0" lang="en-US">
+                <a:latin typeface="Arial"/>
+              </a:rPr>
+              <a:t>A rule an agent gets wrong, or a pattern it should catch: open an issue on github.com/Community-Access/accessibility-agents.</a:t>
+            </a:r>
+          </a:p>
+          <a:p>
+            <a:pPr lvl="1">
+              <a:spcAft>
+                <a:spcPts val="600"/>
+              </a:spcAft>
+            </a:pPr>
+            <a:r>
+              <a:rPr sz="2000" b="0" lang="en-US">
+                <a:latin typeface="Arial"/>
+              </a:rPr>
+              <a:t>The two rules still apply: nothing private goes into any AI, and a person reviews everything an agent writes.</a:t>
+            </a:r>
+          </a:p>
+        </p:txBody>
+      </p:sp>
+    </p:spTree>
+  </p:cSld>
+  <p:clrMapOvr>
+    <a:masterClrMapping/>
+  </p:clrMapOvr>
+</p:sld>
+</file>
+
+<file path=ppt/slides/slide22.xml><?xml version="1.0" encoding="utf-8"?>
+<p:sld xmlns:a="http://schemas.openxmlformats.org/drawingml/2006/main" xmlns:p="http://schemas.openxmlformats.org/presentationml/2006/main" xmlns:r="http://schemas.openxmlformats.org/officeDocument/2006/relationships">
+  <p:cSld>
+    <p:spTree>
+      <p:nvGrpSpPr>
+        <p:cNvPr id="1" name=""/>
+        <p:cNvGrpSpPr/>
+        <p:nvPr/>
+      </p:nvGrpSpPr>
+      <p:grpSpPr/>
+      <p:sp>
+        <p:nvSpPr>
+          <p:cNvPr id="2" name="Title 1"/>
+          <p:cNvSpPr>
+            <a:spLocks noGrp="1"/>
+          </p:cNvSpPr>
+          <p:nvPr>
+            <p:ph type="title"/>
+          </p:nvPr>
+        </p:nvSpPr>
+        <p:spPr>
+          <a:xfrm>
+            <a:off x="548640" y="365760"/>
+            <a:ext cx="11064240" cy="1097280"/>
+          </a:xfrm>
+        </p:spPr>
+        <p:txBody>
+          <a:bodyPr wrap="square"/>
+          <a:lstStyle/>
+          <a:p>
+            <a:r>
+              <a:rPr sz="3600" b="1" lang="en-US">
+                <a:latin typeface="Arial"/>
+              </a:rPr>
+              <a:t>Sources</a:t>
+            </a:r>
+          </a:p>
+        </p:txBody>
+      </p:sp>
+      <p:sp>
+        <p:nvSpPr>
+          <p:cNvPr id="3" name="Content Placeholder 2"/>
+          <p:cNvSpPr>
+            <a:spLocks noGrp="1"/>
+          </p:cNvSpPr>
+          <p:nvPr>
+            <p:ph idx="1"/>
+          </p:nvPr>
+        </p:nvSpPr>
+        <p:spPr>
+          <a:xfrm>
+            <a:off x="548640" y="1554480"/>
+            <a:ext cx="11064240" cy="4937760"/>
+          </a:xfrm>
+        </p:spPr>
+        <p:txBody>
+          <a:bodyPr wrap="square"/>
+          <a:lstStyle/>
+          <a:p>
+            <a:pPr marL="0" indent="0">
+              <a:spcAft>
+                <a:spcPts val="600"/>
+              </a:spcAft>
+              <a:buNone/>
+            </a:pPr>
+            <a:r>
+              <a:rPr sz="2000" b="0" lang="en-US">
+                <a:latin typeface="Arial"/>
+              </a:rPr>
+              <a:t>Checked on 29 October 2026.</a:t>
+            </a:r>
+          </a:p>
+          <a:p>
+            <a:pPr lvl="1">
+              <a:spcAft>
+                <a:spcPts val="600"/>
+              </a:spcAft>
+            </a:pPr>
+            <a:r>
+              <a:rPr sz="2000" b="0" lang="en-US">
+                <a:latin typeface="Arial"/>
+                <a:hlinkClick r:id="rId2"/>
+              </a:rPr>
+              <a:t>Accessibility Agents README</a:t>
+            </a:r>
+            <a:r>
+              <a:rPr sz="2000" b="0" lang="en-US">
+                <a:latin typeface="Arial"/>
+              </a:rPr>
+              <a:t>: the six entry points and the install line for each tool. The kit carries the skills from the commit named in </a:t>
+            </a:r>
+            <a:r>
+              <a:rPr sz="2000" b="0" lang="en-US">
+                <a:latin typeface="Consolas"/>
+              </a:rPr>
+              <a:t>accessibility-agents-skills.json</a:t>
+            </a:r>
+            <a:r>
+              <a:rPr sz="2000" b="0" lang="en-US">
+                <a:latin typeface="Arial"/>
+              </a:rPr>
+              <a:t>.</a:t>
+            </a:r>
+          </a:p>
+          <a:p>
+            <a:pPr lvl="1">
+              <a:spcAft>
+                <a:spcPts val="600"/>
+              </a:spcAft>
+            </a:pPr>
+            <a:r>
+              <a:rPr sz="2000" b="0" lang="en-US">
+                <a:latin typeface="Arial"/>
+                <a:hlinkClick r:id="rId3"/>
+              </a:rPr>
+              <a:t>VS Code: agent plugins</a:t>
+            </a:r>
+            <a:r>
+              <a:rPr sz="2000" b="0" lang="en-US">
+                <a:latin typeface="Arial"/>
+              </a:rPr>
+              <a:t>: installing a plugin from a repository, and the </a:t>
+            </a:r>
+            <a:r>
+              <a:rPr sz="2000" b="0" lang="en-US">
+                <a:latin typeface="Consolas"/>
+              </a:rPr>
+              <a:t>chat.plugins.enabled</a:t>
+            </a:r>
+            <a:r>
+              <a:rPr sz="2000" b="0" lang="en-US">
+                <a:latin typeface="Arial"/>
+              </a:rPr>
+              <a:t> setting it needs.</a:t>
+            </a:r>
+          </a:p>
+          <a:p>
+            <a:pPr lvl="1">
+              <a:spcAft>
+                <a:spcPts val="600"/>
+              </a:spcAft>
+            </a:pPr>
+            <a:r>
+              <a:rPr sz="2000" b="0" lang="en-US">
+                <a:latin typeface="Arial"/>
+                <a:hlinkClick r:id="rId4"/>
+              </a:rPr>
+              <a:t>GitHub Docs: finding and installing Copilot CLI plugins</a:t>
+            </a:r>
+            <a:r>
+              <a:rPr sz="2000" b="0" lang="en-US">
+                <a:latin typeface="Arial"/>
+              </a:rPr>
+              <a:t>: the </a:t>
+            </a:r>
+            <a:r>
+              <a:rPr sz="2000" b="0" lang="en-US">
+                <a:latin typeface="Consolas"/>
+              </a:rPr>
+              <a:t>copilot plugin marketplace add</a:t>
+            </a:r>
+            <a:r>
+              <a:rPr sz="2000" b="0" lang="en-US">
+                <a:latin typeface="Arial"/>
+              </a:rPr>
+              <a:t> and </a:t>
+            </a:r>
+            <a:r>
+              <a:rPr sz="2000" b="0" lang="en-US">
+                <a:latin typeface="Consolas"/>
+              </a:rPr>
+              <a:t>copilot plugin install</a:t>
+            </a:r>
+            <a:r>
+              <a:rPr sz="2000" b="0" lang="en-US">
+                <a:latin typeface="Arial"/>
+              </a:rPr>
+              <a:t> commands.</a:t>
+            </a:r>
+          </a:p>
+          <a:p>
+            <a:pPr lvl="1">
+              <a:spcAft>
+                <a:spcPts val="600"/>
+              </a:spcAft>
+            </a:pPr>
+            <a:r>
+              <a:rPr sz="2000" b="0" lang="en-US">
+                <a:latin typeface="Arial"/>
+                <a:hlinkClick r:id="rId5"/>
+              </a:rPr>
+              <a:t>VS Code: use Agent Skills</a:t>
+            </a:r>
+            <a:r>
+              <a:rPr sz="2000" b="0" lang="en-US">
+                <a:latin typeface="Arial"/>
+              </a:rPr>
+              <a:t>: why copying the skills into </a:t>
+            </a:r>
+            <a:r>
+              <a:rPr sz="2000" b="0" lang="en-US">
+                <a:latin typeface="Consolas"/>
+              </a:rPr>
+              <a:t>.github/skills</a:t>
+            </a:r>
+            <a:r>
+              <a:rPr sz="2000" b="0" lang="en-US">
+                <a:latin typeface="Arial"/>
+              </a:rPr>
+              <a:t> is all an install needs.</a:t>
+            </a:r>
+          </a:p>
+          <a:p>
+            <a:pPr lvl="1">
+              <a:spcAft>
+                <a:spcPts val="600"/>
+              </a:spcAft>
+            </a:pPr>
+            <a:r>
+              <a:rPr sz="2000" b="0" lang="en-US">
+                <a:latin typeface="Arial"/>
+                <a:hlinkClick r:id="rId6"/>
+              </a:rPr>
+              <a:t>GitHub Docs: Codespaces billing</a:t>
+            </a:r>
+            <a:r>
+              <a:rPr sz="2000" b="0" lang="en-US">
+                <a:latin typeface="Arial"/>
+              </a:rPr>
+              <a:t>: the free monthly hours for a personal account.</a:t>
             </a:r>
           </a:p>
         </p:txBody>

--- a/docs/ahg-2026/kit/accessibility-agents.pptx
+++ b/docs/ahg-2026/kit/accessibility-agents.pptx
@@ -4907,7 +4907,19 @@
               <a:rPr sz="2000" b="0" lang="en-US">
                 <a:latin typeface="Arial"/>
               </a:rPr>
-              <a:t> in this kit.</a:t>
+              <a:t> in this kit, and </a:t>
+            </a:r>
+            <a:r>
+              <a:rPr sz="2000" b="0" lang="en-US">
+                <a:latin typeface="Consolas"/>
+              </a:rPr>
+              <a:t>write-your-own-agent.md</a:t>
+            </a:r>
+            <a:r>
+              <a:rPr sz="2000" b="0" lang="en-US">
+                <a:latin typeface="Arial"/>
+              </a:rPr>
+              <a:t> walks through writing a new one from a blank file.</a:t>
             </a:r>
           </a:p>
           <a:p>
